--- a/API/L01-4-API-Financial/6_API_FinLightMe.pptx
+++ b/API/L01-4-API-Financial/6_API_FinLightMe.pptx
@@ -218,7 +218,7 @@
           <a:p>
             <a:fld id="{7BAEECA8-D063-486F-AE31-5020270C1449}" type="datetimeFigureOut">
               <a:rPr lang="en-US" smtClean="0"/>
-              <a:t>5/30/2026</a:t>
+              <a:t>6/3/2026</a:t>
             </a:fld>
             <a:endParaRPr lang="en-US"/>
           </a:p>
@@ -423,7 +423,7 @@
           <a:p>
             <a:fld id="{CB233BD1-3BA8-448D-9D08-7846095EA517}" type="datetimeFigureOut">
               <a:rPr lang="en-US" smtClean="0"/>
-              <a:t>5/30/2026</a:t>
+              <a:t>6/3/2026</a:t>
             </a:fld>
             <a:endParaRPr lang="en-US"/>
           </a:p>
@@ -837,7 +837,7 @@
           <a:p>
             <a:fld id="{6383FAE1-13DE-4511-8C1B-C8AFB720664C}" type="datetimeFigureOut">
               <a:rPr lang="en-US" smtClean="0"/>
-              <a:t>5/30/2026</a:t>
+              <a:t>6/3/2026</a:t>
             </a:fld>
             <a:endParaRPr lang="en-US"/>
           </a:p>
@@ -1035,7 +1035,7 @@
           <a:p>
             <a:fld id="{6383FAE1-13DE-4511-8C1B-C8AFB720664C}" type="datetimeFigureOut">
               <a:rPr lang="en-US" smtClean="0"/>
-              <a:t>5/30/2026</a:t>
+              <a:t>6/3/2026</a:t>
             </a:fld>
             <a:endParaRPr lang="en-US"/>
           </a:p>
@@ -1243,7 +1243,7 @@
           <a:p>
             <a:fld id="{6383FAE1-13DE-4511-8C1B-C8AFB720664C}" type="datetimeFigureOut">
               <a:rPr lang="en-US" smtClean="0"/>
-              <a:t>5/30/2026</a:t>
+              <a:t>6/3/2026</a:t>
             </a:fld>
             <a:endParaRPr lang="en-US"/>
           </a:p>
@@ -1441,7 +1441,7 @@
           <a:p>
             <a:fld id="{6383FAE1-13DE-4511-8C1B-C8AFB720664C}" type="datetimeFigureOut">
               <a:rPr lang="en-US" smtClean="0"/>
-              <a:t>5/30/2026</a:t>
+              <a:t>6/3/2026</a:t>
             </a:fld>
             <a:endParaRPr lang="en-US"/>
           </a:p>
@@ -1716,7 +1716,7 @@
           <a:p>
             <a:fld id="{6383FAE1-13DE-4511-8C1B-C8AFB720664C}" type="datetimeFigureOut">
               <a:rPr lang="en-US" smtClean="0"/>
-              <a:t>5/30/2026</a:t>
+              <a:t>6/3/2026</a:t>
             </a:fld>
             <a:endParaRPr lang="en-US"/>
           </a:p>
@@ -1981,7 +1981,7 @@
           <a:p>
             <a:fld id="{6383FAE1-13DE-4511-8C1B-C8AFB720664C}" type="datetimeFigureOut">
               <a:rPr lang="en-US" smtClean="0"/>
-              <a:t>5/30/2026</a:t>
+              <a:t>6/3/2026</a:t>
             </a:fld>
             <a:endParaRPr lang="en-US"/>
           </a:p>
@@ -2393,7 +2393,7 @@
           <a:p>
             <a:fld id="{6383FAE1-13DE-4511-8C1B-C8AFB720664C}" type="datetimeFigureOut">
               <a:rPr lang="en-US" smtClean="0"/>
-              <a:t>5/30/2026</a:t>
+              <a:t>6/3/2026</a:t>
             </a:fld>
             <a:endParaRPr lang="en-US"/>
           </a:p>
@@ -2534,7 +2534,7 @@
           <a:p>
             <a:fld id="{6383FAE1-13DE-4511-8C1B-C8AFB720664C}" type="datetimeFigureOut">
               <a:rPr lang="en-US" smtClean="0"/>
-              <a:t>5/30/2026</a:t>
+              <a:t>6/3/2026</a:t>
             </a:fld>
             <a:endParaRPr lang="en-US"/>
           </a:p>
@@ -2647,7 +2647,7 @@
           <a:p>
             <a:fld id="{6383FAE1-13DE-4511-8C1B-C8AFB720664C}" type="datetimeFigureOut">
               <a:rPr lang="en-US" smtClean="0"/>
-              <a:t>5/30/2026</a:t>
+              <a:t>6/3/2026</a:t>
             </a:fld>
             <a:endParaRPr lang="en-US"/>
           </a:p>
@@ -2958,7 +2958,7 @@
           <a:p>
             <a:fld id="{6383FAE1-13DE-4511-8C1B-C8AFB720664C}" type="datetimeFigureOut">
               <a:rPr lang="en-US" smtClean="0"/>
-              <a:t>5/30/2026</a:t>
+              <a:t>6/3/2026</a:t>
             </a:fld>
             <a:endParaRPr lang="en-US"/>
           </a:p>
@@ -3249,7 +3249,7 @@
           <a:p>
             <a:fld id="{6383FAE1-13DE-4511-8C1B-C8AFB720664C}" type="datetimeFigureOut">
               <a:rPr lang="en-US" smtClean="0"/>
-              <a:t>5/30/2026</a:t>
+              <a:t>6/3/2026</a:t>
             </a:fld>
             <a:endParaRPr lang="en-US"/>
           </a:p>
@@ -3493,7 +3493,7 @@
           <a:p>
             <a:fld id="{6383FAE1-13DE-4511-8C1B-C8AFB720664C}" type="datetimeFigureOut">
               <a:rPr lang="en-US" smtClean="0"/>
-              <a:t>5/30/2026</a:t>
+              <a:t>6/3/2026</a:t>
             </a:fld>
             <a:endParaRPr lang="en-US"/>
           </a:p>
@@ -4451,8 +4451,8 @@
           </a:p>
         </p:txBody>
       </p:sp>
-      <mc:AlternateContent xmlns:mc="http://schemas.openxmlformats.org/markup-compatibility/2006">
-        <mc:Choice xmlns:p14="http://schemas.microsoft.com/office/powerpoint/2010/main" Requires="p14">
+      <mc:AlternateContent xmlns:mc="http://schemas.openxmlformats.org/markup-compatibility/2006" xmlns:p14="http://schemas.microsoft.com/office/powerpoint/2010/main">
+        <mc:Choice Requires="p14">
           <p:contentPart p14:bwMode="auto" r:id="rId3">
             <p14:nvContentPartPr>
               <p14:cNvPr id="6" name="Ink 5">
@@ -4471,7 +4471,7 @@
             </p14:xfrm>
           </p:contentPart>
         </mc:Choice>
-        <mc:Fallback>
+        <mc:Fallback xmlns="">
           <p:pic>
             <p:nvPicPr>
               <p:cNvPr id="6" name="Ink 5">
@@ -4538,6 +4538,36 @@
           <a:chExt cx="0" cy="0"/>
         </a:xfrm>
       </p:grpSpPr>
+      <p:pic>
+        <p:nvPicPr>
+          <p:cNvPr id="3" name="Picture 2">
+            <a:extLst>
+              <a:ext uri="{FF2B5EF4-FFF2-40B4-BE49-F238E27FC236}">
+                <a16:creationId xmlns:a16="http://schemas.microsoft.com/office/drawing/2014/main" id="{0CF5F238-83FB-9024-14DA-4E8C93645B1A}"/>
+              </a:ext>
+            </a:extLst>
+          </p:cNvPr>
+          <p:cNvPicPr>
+            <a:picLocks noChangeAspect="1"/>
+          </p:cNvPicPr>
+          <p:nvPr/>
+        </p:nvPicPr>
+        <p:blipFill>
+          <a:blip r:embed="rId2"/>
+          <a:stretch>
+            <a:fillRect/>
+          </a:stretch>
+        </p:blipFill>
+        <p:spPr>
+          <a:xfrm>
+            <a:off x="274320" y="1751931"/>
+            <a:ext cx="11305032" cy="3163420"/>
+          </a:xfrm>
+          <a:prstGeom prst="rect">
+            <a:avLst/>
+          </a:prstGeom>
+        </p:spPr>
+      </p:pic>
     </p:spTree>
     <p:extLst>
       <p:ext uri="{BB962C8B-B14F-4D97-AF65-F5344CB8AC3E}">
